--- a/Documents/기술경진대회/연구소기술경진대회_개발2팀 유경선, 이기성, 최중건_피드포워드 오토포커스_261020.pptx
+++ b/Documents/기술경진대회/연구소기술경진대회_개발2팀 유경선, 이기성, 최중건_피드포워드 오토포커스_261020.pptx
@@ -9032,16 +9032,56 @@
         <p:spPr>
           <a:xfrm>
             <a:off x="868680" y="1874519"/>
-            <a:ext cx="3441098" cy="4297680"/>
+            <a:ext cx="3382526" cy="4224528"/>
           </a:xfrm>
           <a:prstGeom prst="rect">
             <a:avLst/>
           </a:prstGeom>
         </p:spPr>
       </p:pic>
+      <p:sp>
+        <p:nvSpPr>
+          <p:cNvPr id="6" name="TextBox 5"/>
+          <p:cNvSpPr txBox="1"/>
+          <p:nvPr/>
+        </p:nvSpPr>
+        <p:spPr>
+          <a:xfrm>
+            <a:off x="868680" y="6126480"/>
+            <a:ext cx="3383280" cy="402336"/>
+          </a:xfrm>
+          <a:prstGeom prst="rect">
+            <a:avLst/>
+          </a:prstGeom>
+          <a:noFill/>
+        </p:spPr>
+        <p:txBody>
+          <a:bodyPr wrap="square" anchor="t" lIns="0" rIns="0" tIns="0" bIns="0">
+            <a:spAutoFit/>
+          </a:bodyPr>
+          <a:lstStyle/>
+          <a:p>
+            <a:pPr algn="ctr">
+              <a:lnSpc>
+                <a:spcPct val="115000"/>
+              </a:lnSpc>
+            </a:pPr>
+            <a:r>
+              <a:rPr sz="950" b="0" i="0">
+                <a:solidFill>
+                  <a:srgbClr val="666666"/>
+                </a:solidFill>
+                <a:latin typeface="맑은 고딕"/>
+                <a:ea typeface="맑은 고딕"/>
+              </a:rPr>
+              <a:t>화면은 설정 변경 전 캡처 — Vel 은 현재 150,000</a:t>
+            </a:r>
+          </a:p>
+        </p:txBody>
+      </p:sp>
       <p:graphicFrame>
         <p:nvGraphicFramePr>
-          <p:cNvPr id="6" name="Table 5"/>
+          <p:cNvPr id="7" name="Table 6"/>
           <p:cNvGraphicFramePr>
             <a:graphicFrameLocks noGrp="1"/>
           </p:cNvGraphicFramePr>
